--- a/content/W01/D3/slides/C2_W01_D03_deck_STUDENT.pptx
+++ b/content/W01/D3/slides/C2_W01_D03_deck_STUDENT.pptx
@@ -9047,8 +9047,8 @@
         </p:blipFill>
         <p:spPr>
           <a:xfrm>
-            <a:off x="2080483" y="1627632"/>
-            <a:ext cx="8030727" cy="2769615"/>
+            <a:off x="1775575" y="1517904"/>
+            <a:ext cx="8640544" cy="2979928"/>
           </a:xfrm>
           <a:prstGeom prst="rect">
             <a:avLst/>
@@ -9063,8 +9063,8 @@
         </p:nvSpPr>
         <p:spPr>
           <a:xfrm>
-            <a:off x="685800" y="4506976"/>
-            <a:ext cx="10820095" cy="1546352"/>
+            <a:off x="685800" y="4543552"/>
+            <a:ext cx="10820095" cy="1509775"/>
           </a:xfrm>
           <a:prstGeom prst="rect">
             <a:avLst/>
@@ -11023,8 +11023,8 @@
         </p:blipFill>
         <p:spPr>
           <a:xfrm>
-            <a:off x="3267029" y="1627632"/>
-            <a:ext cx="5657636" cy="3460496"/>
+            <a:off x="3095107" y="1517904"/>
+            <a:ext cx="6001479" cy="3670807"/>
           </a:xfrm>
           <a:prstGeom prst="rect">
             <a:avLst/>
@@ -11039,8 +11039,8 @@
         </p:nvSpPr>
         <p:spPr>
           <a:xfrm>
-            <a:off x="685800" y="5197856"/>
-            <a:ext cx="10820095" cy="855471"/>
+            <a:off x="685800" y="5234432"/>
+            <a:ext cx="10820095" cy="818896"/>
           </a:xfrm>
           <a:prstGeom prst="rect">
             <a:avLst/>
@@ -15986,8 +15986,8 @@
         </p:blipFill>
         <p:spPr>
           <a:xfrm>
-            <a:off x="1979161" y="1627632"/>
-            <a:ext cx="2065918" cy="4425696"/>
+            <a:off x="5239079" y="1517904"/>
+            <a:ext cx="1713536" cy="3670807"/>
           </a:xfrm>
           <a:prstGeom prst="rect">
             <a:avLst/>
@@ -16002,8 +16002,8 @@
         </p:nvSpPr>
         <p:spPr>
           <a:xfrm>
-            <a:off x="5771244" y="3385312"/>
-            <a:ext cx="5734650" cy="910336"/>
+            <a:off x="685800" y="5234432"/>
+            <a:ext cx="10820095" cy="818896"/>
           </a:xfrm>
           <a:prstGeom prst="rect">
             <a:avLst/>
@@ -16016,11 +16016,6 @@
           </a:bodyPr>
           <a:lstStyle/>
           <a:p>
-            <a:pPr>
-              <a:spcAft>
-                <a:spcPts val="900"/>
-              </a:spcAft>
-            </a:pPr>
             <a:r>
               <a:rPr sz="2000" b="0">
                 <a:solidFill>
@@ -40363,7 +40358,7 @@
         <p:spPr>
           <a:xfrm>
             <a:off x="685800" y="1627632"/>
-            <a:ext cx="10820095" cy="706628"/>
+            <a:ext cx="10820095" cy="778764"/>
           </a:xfrm>
           <a:prstGeom prst="rect">
             <a:avLst/>
@@ -40407,7 +40402,7 @@
         <p:spPr>
           <a:xfrm>
             <a:off x="685800" y="1627632"/>
-            <a:ext cx="50292" cy="706628"/>
+            <a:ext cx="50292" cy="778764"/>
           </a:xfrm>
           <a:prstGeom prst="rect">
             <a:avLst/>
@@ -40451,7 +40446,7 @@
         <p:spPr>
           <a:xfrm>
             <a:off x="941832" y="1719072"/>
-            <a:ext cx="10362895" cy="560324"/>
+            <a:ext cx="10362895" cy="632460"/>
           </a:xfrm>
           <a:prstGeom prst="rect">
             <a:avLst/>
@@ -40465,7 +40460,7 @@
           <a:lstStyle/>
           <a:p>
             <a:r>
-              <a:rPr sz="1300" b="1">
+              <a:rPr sz="1500" b="1">
                 <a:solidFill>
                   <a:srgbClr val="2B4A7D"/>
                 </a:solidFill>
@@ -40474,7 +40469,7 @@
               <a:t>The claim. </a:t>
             </a:r>
             <a:r>
-              <a:rPr sz="1300" b="0">
+              <a:rPr sz="1500" b="0">
                 <a:solidFill>
                   <a:srgbClr val="1C1C1A"/>
                 </a:solidFill>
@@ -40494,8 +40489,8 @@
           <p:nvPr/>
         </p:nvGraphicFramePr>
         <p:xfrm>
-          <a:off x="685800" y="2498852"/>
-          <a:ext cx="10820095" cy="1243584"/>
+          <a:off x="685800" y="2570988"/>
+          <a:ext cx="10820094" cy="1243584"/>
         </p:xfrm>
         <a:graphic>
           <a:graphicData uri="http://schemas.openxmlformats.org/drawingml/2006/table">
@@ -40504,8 +40499,8 @@
                 <a:tableStyleId>{2D5ABB26-0587-4C30-8999-92F81FD0307C}</a:tableStyleId>
               </a:tblPr>
               <a:tblGrid>
-                <a:gridCol w="2861879"/>
-                <a:gridCol w="7958216"/>
+                <a:gridCol w="2842558"/>
+                <a:gridCol w="7977536"/>
               </a:tblGrid>
               <a:tr h="310896">
                 <a:tc>
@@ -40514,7 +40509,7 @@
                     <a:lstStyle/>
                     <a:p>
                       <a:r>
-                        <a:rPr sz="1100" b="1">
+                        <a:rPr sz="1000" b="1">
                           <a:solidFill>
                             <a:srgbClr val="FFFFFF"/>
                           </a:solidFill>
@@ -40536,7 +40531,7 @@
                     <a:lstStyle/>
                     <a:p>
                       <a:r>
-                        <a:rPr sz="1100" b="1">
+                        <a:rPr sz="1000" b="1">
                           <a:solidFill>
                             <a:srgbClr val="FFFFFF"/>
                           </a:solidFill>
@@ -40560,7 +40555,7 @@
                     <a:lstStyle/>
                     <a:p>
                       <a:r>
-                        <a:rPr sz="1000" b="0">
+                        <a:rPr sz="900" b="0">
                           <a:solidFill>
                             <a:srgbClr val="1C1C1A"/>
                           </a:solidFill>
@@ -40582,7 +40577,7 @@
                     <a:lstStyle/>
                     <a:p>
                       <a:r>
-                        <a:rPr sz="1000" b="0">
+                        <a:rPr sz="900" b="0">
                           <a:solidFill>
                             <a:srgbClr val="1C1C1A"/>
                           </a:solidFill>
@@ -40606,7 +40601,7 @@
                     <a:lstStyle/>
                     <a:p>
                       <a:r>
-                        <a:rPr sz="1000" b="0">
+                        <a:rPr sz="900" b="0">
                           <a:solidFill>
                             <a:srgbClr val="1C1C1A"/>
                           </a:solidFill>
@@ -40628,7 +40623,7 @@
                     <a:lstStyle/>
                     <a:p>
                       <a:r>
-                        <a:rPr sz="1000" b="0">
+                        <a:rPr sz="900" b="0">
                           <a:solidFill>
                             <a:srgbClr val="1C1C1A"/>
                           </a:solidFill>
@@ -40652,7 +40647,7 @@
                     <a:lstStyle/>
                     <a:p>
                       <a:r>
-                        <a:rPr sz="1000" b="0">
+                        <a:rPr sz="900" b="0">
                           <a:solidFill>
                             <a:srgbClr val="1C1C1A"/>
                           </a:solidFill>
@@ -40674,7 +40669,7 @@
                     <a:lstStyle/>
                     <a:p>
                       <a:r>
-                        <a:rPr sz="1000" b="0">
+                        <a:rPr sz="900" b="0">
                           <a:solidFill>
                             <a:srgbClr val="1C1C1A"/>
                           </a:solidFill>
@@ -40703,8 +40698,8 @@
         </p:nvSpPr>
         <p:spPr>
           <a:xfrm>
-            <a:off x="685800" y="3998468"/>
-            <a:ext cx="10820095" cy="472186"/>
+            <a:off x="685800" y="4070604"/>
+            <a:ext cx="10820095" cy="508254"/>
           </a:xfrm>
           <a:prstGeom prst="rect">
             <a:avLst/>
@@ -40747,8 +40742,8 @@
         </p:nvSpPr>
         <p:spPr>
           <a:xfrm>
-            <a:off x="685800" y="3998468"/>
-            <a:ext cx="50292" cy="472186"/>
+            <a:off x="685800" y="4070604"/>
+            <a:ext cx="50292" cy="508254"/>
           </a:xfrm>
           <a:prstGeom prst="rect">
             <a:avLst/>
@@ -40791,8 +40786,8 @@
         </p:nvSpPr>
         <p:spPr>
           <a:xfrm>
-            <a:off x="941832" y="4089908"/>
-            <a:ext cx="10362895" cy="325882"/>
+            <a:off x="941832" y="4162044"/>
+            <a:ext cx="10362895" cy="361950"/>
           </a:xfrm>
           <a:prstGeom prst="rect">
             <a:avLst/>
@@ -40806,7 +40801,7 @@
           <a:lstStyle/>
           <a:p>
             <a:r>
-              <a:rPr sz="1300" b="1">
+              <a:rPr sz="1500" b="1">
                 <a:solidFill>
                   <a:srgbClr val="2B4A7D"/>
                 </a:solidFill>
@@ -40815,7 +40810,7 @@
               <a:t>The mental model. </a:t>
             </a:r>
             <a:r>
-              <a:rPr sz="1300" b="0">
+              <a:rPr sz="1500" b="0">
                 <a:solidFill>
                   <a:srgbClr val="1C1C1A"/>
                 </a:solidFill>
@@ -40828,7 +40823,7 @@
       </p:sp>
       <p:pic>
         <p:nvPicPr>
-          <p:cNvPr id="13" name="Picture 12" descr="3ea4935bf01839fb.png"/>
+          <p:cNvPr id="13" name="Picture 12" descr="898ed71942fd03ef.png"/>
           <p:cNvPicPr>
             <a:picLocks noChangeAspect="1"/>
           </p:cNvPicPr>
@@ -40842,8 +40837,8 @@
         </p:blipFill>
         <p:spPr>
           <a:xfrm>
-            <a:off x="3274104" y="4635246"/>
-            <a:ext cx="5643485" cy="1418082"/>
+            <a:off x="685800" y="5057003"/>
+            <a:ext cx="10820095" cy="803929"/>
           </a:xfrm>
           <a:prstGeom prst="rect">
             <a:avLst/>
@@ -44365,7 +44360,7 @@
         <p:spPr>
           <a:xfrm>
             <a:off x="685800" y="1627632"/>
-            <a:ext cx="5135727" cy="1770633"/>
+            <a:ext cx="5135727" cy="1590294"/>
           </a:xfrm>
           <a:prstGeom prst="rect">
             <a:avLst/>
@@ -44409,7 +44404,7 @@
         <p:spPr>
           <a:xfrm>
             <a:off x="685800" y="1627632"/>
-            <a:ext cx="50292" cy="1770633"/>
+            <a:ext cx="50292" cy="1590294"/>
           </a:xfrm>
           <a:prstGeom prst="rect">
             <a:avLst/>
@@ -44453,7 +44448,7 @@
         <p:spPr>
           <a:xfrm>
             <a:off x="941832" y="1719072"/>
-            <a:ext cx="4678527" cy="1624330"/>
+            <a:ext cx="4678527" cy="1443990"/>
           </a:xfrm>
           <a:prstGeom prst="rect">
             <a:avLst/>
@@ -44467,7 +44462,7 @@
           <a:lstStyle/>
           <a:p>
             <a:r>
-              <a:rPr sz="1700" b="1">
+              <a:rPr sz="1500" b="1">
                 <a:solidFill>
                   <a:srgbClr val="2B4A7D"/>
                 </a:solidFill>
@@ -44476,7 +44471,7 @@
               <a:t>The claim. </a:t>
             </a:r>
             <a:r>
-              <a:rPr sz="1700" b="0">
+              <a:rPr sz="1500" b="0">
                 <a:solidFill>
                   <a:srgbClr val="1C1C1A"/>
                 </a:solidFill>
@@ -44496,8 +44491,8 @@
           <p:nvPr/>
         </p:nvGraphicFramePr>
         <p:xfrm>
-          <a:off x="685800" y="3562858"/>
-          <a:ext cx="5135727" cy="1499616"/>
+          <a:off x="685800" y="3382518"/>
+          <a:ext cx="5135726" cy="1499616"/>
         </p:xfrm>
         <a:graphic>
           <a:graphicData uri="http://schemas.openxmlformats.org/drawingml/2006/table">
@@ -44506,8 +44501,8 @@
                 <a:tableStyleId>{2D5ABB26-0587-4C30-8999-92F81FD0307C}</a:tableStyleId>
               </a:tblPr>
               <a:tblGrid>
-                <a:gridCol w="1427393"/>
-                <a:gridCol w="3708334"/>
+                <a:gridCol w="1299789"/>
+                <a:gridCol w="3835937"/>
               </a:tblGrid>
               <a:tr h="310896">
                 <a:tc>
@@ -44706,7 +44701,7 @@
         <p:spPr>
           <a:xfrm>
             <a:off x="6370167" y="1627632"/>
-            <a:ext cx="5135727" cy="1100328"/>
+            <a:ext cx="5135727" cy="737616"/>
           </a:xfrm>
           <a:prstGeom prst="rect">
             <a:avLst/>
@@ -44721,11 +44716,11 @@
           <a:p>
             <a:pPr>
               <a:spcAft>
-                <a:spcPts val="800"/>
+                <a:spcPts val="700"/>
               </a:spcAft>
             </a:pPr>
             <a:r>
-              <a:rPr sz="1700" b="0">
+              <a:rPr sz="1500" b="0">
                 <a:solidFill>
                   <a:srgbClr val="1C1C1A"/>
                 </a:solidFill>
@@ -44744,8 +44739,8 @@
         </p:nvSpPr>
         <p:spPr>
           <a:xfrm>
-            <a:off x="6370167" y="2855976"/>
-            <a:ext cx="5135727" cy="1157477"/>
+            <a:off x="6370167" y="2493264"/>
+            <a:ext cx="5135727" cy="1049274"/>
           </a:xfrm>
           <a:prstGeom prst="rect">
             <a:avLst/>
@@ -44788,8 +44783,8 @@
         </p:nvSpPr>
         <p:spPr>
           <a:xfrm>
-            <a:off x="6370167" y="2855976"/>
-            <a:ext cx="50292" cy="1157477"/>
+            <a:off x="6370167" y="2493264"/>
+            <a:ext cx="50292" cy="1049274"/>
           </a:xfrm>
           <a:prstGeom prst="rect">
             <a:avLst/>
@@ -44832,8 +44827,8 @@
         </p:nvSpPr>
         <p:spPr>
           <a:xfrm>
-            <a:off x="6626199" y="2947416"/>
-            <a:ext cx="4678527" cy="1011173"/>
+            <a:off x="6626199" y="2584704"/>
+            <a:ext cx="4678527" cy="902969"/>
           </a:xfrm>
           <a:prstGeom prst="rect">
             <a:avLst/>
@@ -44847,7 +44842,7 @@
           <a:lstStyle/>
           <a:p>
             <a:r>
-              <a:rPr sz="1700" b="1">
+              <a:rPr sz="1500" b="1">
                 <a:solidFill>
                   <a:srgbClr val="2B4A7D"/>
                 </a:solidFill>
@@ -44856,7 +44851,7 @@
               <a:t>The mental model. </a:t>
             </a:r>
             <a:r>
-              <a:rPr sz="1700" b="0">
+              <a:rPr sz="1500" b="0">
                 <a:solidFill>
                   <a:srgbClr val="1C1C1A"/>
                 </a:solidFill>
@@ -44883,8 +44878,8 @@
         </p:blipFill>
         <p:spPr>
           <a:xfrm>
-            <a:off x="7126903" y="4178045"/>
-            <a:ext cx="3622255" cy="1875282"/>
+            <a:off x="6672098" y="3707130"/>
+            <a:ext cx="4531866" cy="2346197"/>
           </a:xfrm>
           <a:prstGeom prst="rect">
             <a:avLst/>
